--- a/docs/无脚本浏览器指纹识别系统测试汇报.pptx
+++ b/docs/无脚本浏览器指纹识别系统测试汇报.pptx
@@ -22704,7 +22704,7 @@
         </p:nvSpPr>
         <p:spPr>
           <a:xfrm>
-            <a:off x="4986655" y="3150235"/>
+            <a:off x="5151755" y="3156585"/>
             <a:ext cx="2222500" cy="317500"/>
           </a:xfrm>
           <a:prstGeom prst="rect">
@@ -28324,7 +28324,7 @@
                 <a:cs typeface="Noto Sans SC" panose="020B0200000000000000" charset="-122"/>
                 <a:sym typeface="+mn-ea"/>
               </a:rPr>
-              <a:t>未修复</a:t>
+              <a:t>典型踩坑</a:t>
             </a:r>
             <a:r>
               <a:rPr lang="zh-CN" altLang="en-US" sz="2000" b="1">
@@ -28336,31 +28336,7 @@
                 <a:cs typeface="Noto Sans SC" panose="020B0200000000000000" charset="-122"/>
                 <a:sym typeface="+mn-ea"/>
               </a:rPr>
-              <a:t>“BUG</a:t>
-            </a:r>
-            <a:r>
-              <a:rPr lang="en-US" altLang="zh-CN" sz="2000" b="1">
-                <a:solidFill>
-                  <a:srgbClr val="34D399"/>
-                </a:solidFill>
-                <a:latin typeface="Noto Sans SC" panose="020B0200000000000000" charset="-122"/>
-                <a:ea typeface="Noto Sans SC" panose="020B0200000000000000" charset="-122"/>
-                <a:cs typeface="Noto Sans SC" panose="020B0200000000000000" charset="-122"/>
-                <a:sym typeface="+mn-ea"/>
-              </a:rPr>
-              <a:t>”</a:t>
-            </a:r>
-            <a:r>
-              <a:rPr lang="zh-CN" altLang="en-US" sz="2000" b="1">
-                <a:solidFill>
-                  <a:srgbClr val="34D399"/>
-                </a:solidFill>
-                <a:latin typeface="Noto Sans SC" panose="020B0200000000000000" charset="-122"/>
-                <a:ea typeface="Noto Sans SC" panose="020B0200000000000000" charset="-122"/>
-                <a:cs typeface="Noto Sans SC" panose="020B0200000000000000" charset="-122"/>
-                <a:sym typeface="+mn-ea"/>
-              </a:rPr>
-              <a:t>讨论</a:t>
+              <a:t>收获</a:t>
             </a:r>
             <a:endParaRPr lang="zh-CN" altLang="en-US" sz="2000" b="1">
               <a:solidFill>
@@ -28455,7 +28431,7 @@
                 <a:cs typeface="Noto Sans SC" panose="020B0200000000000000" charset="-122"/>
                 <a:sym typeface="Noto Sans SC" panose="020B0200000000000000" charset="-122"/>
               </a:rPr>
-              <a:t>我们认为</a:t>
+              <a:t>文件名不能只依赖业务参数，重复请求天然会碰撞；写文件前要考虑幂等、归档或唯一标识，否则</a:t>
             </a:r>
             <a:r>
               <a:rPr lang="en-US" altLang="zh-CN" sz="1400" b="0" i="0" u="none" strike="noStrike">
@@ -28467,7 +28443,7 @@
                 <a:cs typeface="Noto Sans SC" panose="020B0200000000000000" charset="-122"/>
                 <a:sym typeface="Noto Sans SC" panose="020B0200000000000000" charset="-122"/>
               </a:rPr>
-              <a:t>BUG001</a:t>
+              <a:t> "w" </a:t>
             </a:r>
             <a:r>
               <a:rPr lang="zh-CN" altLang="en-US" sz="1400" b="0" i="0" u="none" strike="noStrike">
@@ -28479,213 +28455,9 @@
                 <a:cs typeface="Noto Sans SC" panose="020B0200000000000000" charset="-122"/>
                 <a:sym typeface="Noto Sans SC" panose="020B0200000000000000" charset="-122"/>
               </a:rPr>
-              <a:t>虽然在执行时不满足预期</a:t>
+              <a:t>模式会悄悄把历史数据覆盖掉</a:t>
             </a:r>
-            <a:r>
-              <a:rPr lang="en-US" altLang="zh-CN" sz="1400" b="0" i="0" u="none" strike="noStrike">
-                <a:solidFill>
-                  <a:srgbClr val="E5E7EB"/>
-                </a:solidFill>
-                <a:latin typeface="Noto Sans SC" panose="020B0200000000000000" charset="-122"/>
-                <a:ea typeface="Noto Sans SC" panose="020B0200000000000000" charset="-122"/>
-                <a:cs typeface="Noto Sans SC" panose="020B0200000000000000" charset="-122"/>
-                <a:sym typeface="Noto Sans SC" panose="020B0200000000000000" charset="-122"/>
-              </a:rPr>
-              <a:t>,</a:t>
-            </a:r>
-            <a:r>
-              <a:rPr lang="zh-CN" altLang="en-US" sz="1400" b="0" i="0" u="none" strike="noStrike">
-                <a:solidFill>
-                  <a:srgbClr val="E5E7EB"/>
-                </a:solidFill>
-                <a:latin typeface="Noto Sans SC" panose="020B0200000000000000" charset="-122"/>
-                <a:ea typeface="Noto Sans SC" panose="020B0200000000000000" charset="-122"/>
-                <a:cs typeface="Noto Sans SC" panose="020B0200000000000000" charset="-122"/>
-                <a:sym typeface="Noto Sans SC" panose="020B0200000000000000" charset="-122"/>
-              </a:rPr>
-              <a:t>但在研究系统功能后</a:t>
-            </a:r>
-            <a:r>
-              <a:rPr lang="en-US" altLang="zh-CN" sz="1400" b="0" i="0" u="none" strike="noStrike">
-                <a:solidFill>
-                  <a:srgbClr val="E5E7EB"/>
-                </a:solidFill>
-                <a:latin typeface="Noto Sans SC" panose="020B0200000000000000" charset="-122"/>
-                <a:ea typeface="Noto Sans SC" panose="020B0200000000000000" charset="-122"/>
-                <a:cs typeface="Noto Sans SC" panose="020B0200000000000000" charset="-122"/>
-                <a:sym typeface="Noto Sans SC" panose="020B0200000000000000" charset="-122"/>
-              </a:rPr>
-              <a:t>,</a:t>
-            </a:r>
-            <a:r>
-              <a:rPr lang="zh-CN" altLang="en-US" sz="1400" b="0" i="0" u="none" strike="noStrike">
-                <a:solidFill>
-                  <a:srgbClr val="E5E7EB"/>
-                </a:solidFill>
-                <a:latin typeface="Noto Sans SC" panose="020B0200000000000000" charset="-122"/>
-                <a:ea typeface="Noto Sans SC" panose="020B0200000000000000" charset="-122"/>
-                <a:cs typeface="Noto Sans SC" panose="020B0200000000000000" charset="-122"/>
-                <a:sym typeface="Noto Sans SC" panose="020B0200000000000000" charset="-122"/>
-              </a:rPr>
-              <a:t>我们发现</a:t>
-            </a:r>
-            <a:r>
-              <a:rPr lang="en-US" altLang="zh-CN" sz="1400" b="0" i="0" u="none" strike="noStrike">
-                <a:solidFill>
-                  <a:srgbClr val="E5E7EB"/>
-                </a:solidFill>
-                <a:latin typeface="Noto Sans SC" panose="020B0200000000000000" charset="-122"/>
-                <a:ea typeface="Noto Sans SC" panose="020B0200000000000000" charset="-122"/>
-                <a:cs typeface="Noto Sans SC" panose="020B0200000000000000" charset="-122"/>
-                <a:sym typeface="Noto Sans SC" panose="020B0200000000000000" charset="-122"/>
-              </a:rPr>
-              <a:t>CPU</a:t>
-            </a:r>
-            <a:r>
-              <a:rPr lang="zh-CN" altLang="en-US" sz="1400" b="0" i="0" u="none" strike="noStrike">
-                <a:solidFill>
-                  <a:srgbClr val="E5E7EB"/>
-                </a:solidFill>
-                <a:latin typeface="Noto Sans SC" panose="020B0200000000000000" charset="-122"/>
-                <a:ea typeface="Noto Sans SC" panose="020B0200000000000000" charset="-122"/>
-                <a:cs typeface="Noto Sans SC" panose="020B0200000000000000" charset="-122"/>
-                <a:sym typeface="Noto Sans SC" panose="020B0200000000000000" charset="-122"/>
-              </a:rPr>
-              <a:t>等硬件对浏览器的渲染不仅收到</a:t>
-            </a:r>
-            <a:r>
-              <a:rPr lang="en-US" altLang="zh-CN" sz="1400" b="0" i="0" u="none" strike="noStrike">
-                <a:solidFill>
-                  <a:srgbClr val="E5E7EB"/>
-                </a:solidFill>
-                <a:latin typeface="Noto Sans SC" panose="020B0200000000000000" charset="-122"/>
-                <a:ea typeface="Noto Sans SC" panose="020B0200000000000000" charset="-122"/>
-                <a:cs typeface="Noto Sans SC" panose="020B0200000000000000" charset="-122"/>
-                <a:sym typeface="Noto Sans SC" panose="020B0200000000000000" charset="-122"/>
-              </a:rPr>
-              <a:t>CPU</a:t>
-            </a:r>
-            <a:r>
-              <a:rPr lang="zh-CN" altLang="en-US" sz="1400" b="0" i="0" u="none" strike="noStrike">
-                <a:solidFill>
-                  <a:srgbClr val="E5E7EB"/>
-                </a:solidFill>
-                <a:latin typeface="Noto Sans SC" panose="020B0200000000000000" charset="-122"/>
-                <a:ea typeface="Noto Sans SC" panose="020B0200000000000000" charset="-122"/>
-                <a:cs typeface="Noto Sans SC" panose="020B0200000000000000" charset="-122"/>
-                <a:sym typeface="Noto Sans SC" panose="020B0200000000000000" charset="-122"/>
-              </a:rPr>
-              <a:t>型号等的影响</a:t>
-            </a:r>
-            <a:r>
-              <a:rPr lang="en-US" altLang="zh-CN" sz="1400" b="0" i="0" u="none" strike="noStrike">
-                <a:solidFill>
-                  <a:srgbClr val="E5E7EB"/>
-                </a:solidFill>
-                <a:latin typeface="Noto Sans SC" panose="020B0200000000000000" charset="-122"/>
-                <a:ea typeface="Noto Sans SC" panose="020B0200000000000000" charset="-122"/>
-                <a:cs typeface="Noto Sans SC" panose="020B0200000000000000" charset="-122"/>
-                <a:sym typeface="Noto Sans SC" panose="020B0200000000000000" charset="-122"/>
-              </a:rPr>
-              <a:t>,</a:t>
-            </a:r>
-            <a:r>
-              <a:rPr lang="zh-CN" altLang="en-US" sz="1400" b="0" i="0" u="none" strike="noStrike">
-                <a:solidFill>
-                  <a:srgbClr val="E5E7EB"/>
-                </a:solidFill>
-                <a:latin typeface="Noto Sans SC" panose="020B0200000000000000" charset="-122"/>
-                <a:ea typeface="Noto Sans SC" panose="020B0200000000000000" charset="-122"/>
-                <a:cs typeface="Noto Sans SC" panose="020B0200000000000000" charset="-122"/>
-                <a:sym typeface="Noto Sans SC" panose="020B0200000000000000" charset="-122"/>
-              </a:rPr>
-              <a:t>也会在不同的环境产生不同的渲染路径</a:t>
-            </a:r>
-            <a:r>
-              <a:rPr lang="en-US" altLang="zh-CN" sz="1400" b="0" i="0" u="none" strike="noStrike">
-                <a:solidFill>
-                  <a:srgbClr val="E5E7EB"/>
-                </a:solidFill>
-                <a:latin typeface="Noto Sans SC" panose="020B0200000000000000" charset="-122"/>
-                <a:ea typeface="Noto Sans SC" panose="020B0200000000000000" charset="-122"/>
-                <a:cs typeface="Noto Sans SC" panose="020B0200000000000000" charset="-122"/>
-                <a:sym typeface="Noto Sans SC" panose="020B0200000000000000" charset="-122"/>
-              </a:rPr>
-              <a:t>,</a:t>
-            </a:r>
-            <a:r>
-              <a:rPr lang="zh-CN" altLang="en-US" sz="1400" b="0" i="0" u="none" strike="noStrike">
-                <a:solidFill>
-                  <a:srgbClr val="E5E7EB"/>
-                </a:solidFill>
-                <a:latin typeface="Noto Sans SC" panose="020B0200000000000000" charset="-122"/>
-                <a:ea typeface="Noto Sans SC" panose="020B0200000000000000" charset="-122"/>
-                <a:cs typeface="Noto Sans SC" panose="020B0200000000000000" charset="-122"/>
-                <a:sym typeface="Noto Sans SC" panose="020B0200000000000000" charset="-122"/>
-              </a:rPr>
-              <a:t>如会有不同的蜂鸣值</a:t>
-            </a:r>
-            <a:r>
-              <a:rPr lang="en-US" altLang="zh-CN" sz="1400" b="0" i="0" u="none" strike="noStrike">
-                <a:solidFill>
-                  <a:srgbClr val="E5E7EB"/>
-                </a:solidFill>
-                <a:latin typeface="Noto Sans SC" panose="020B0200000000000000" charset="-122"/>
-                <a:ea typeface="Noto Sans SC" panose="020B0200000000000000" charset="-122"/>
-                <a:cs typeface="Noto Sans SC" panose="020B0200000000000000" charset="-122"/>
-                <a:sym typeface="Noto Sans SC" panose="020B0200000000000000" charset="-122"/>
-              </a:rPr>
-              <a:t>,</a:t>
-            </a:r>
-            <a:r>
-              <a:rPr lang="zh-CN" altLang="en-US" sz="1400" b="0" i="0" u="none" strike="noStrike">
-                <a:solidFill>
-                  <a:srgbClr val="E5E7EB"/>
-                </a:solidFill>
-                <a:latin typeface="Noto Sans SC" panose="020B0200000000000000" charset="-122"/>
-                <a:ea typeface="Noto Sans SC" panose="020B0200000000000000" charset="-122"/>
-                <a:cs typeface="Noto Sans SC" panose="020B0200000000000000" charset="-122"/>
-                <a:sym typeface="Noto Sans SC" panose="020B0200000000000000" charset="-122"/>
-              </a:rPr>
-              <a:t>因此我们认为</a:t>
-            </a:r>
-            <a:r>
-              <a:rPr lang="en-US" altLang="zh-CN" sz="1400" b="0" i="0" u="none" strike="noStrike">
-                <a:solidFill>
-                  <a:srgbClr val="E5E7EB"/>
-                </a:solidFill>
-                <a:latin typeface="Noto Sans SC" panose="020B0200000000000000" charset="-122"/>
-                <a:ea typeface="Noto Sans SC" panose="020B0200000000000000" charset="-122"/>
-                <a:cs typeface="Noto Sans SC" panose="020B0200000000000000" charset="-122"/>
-                <a:sym typeface="Noto Sans SC" panose="020B0200000000000000" charset="-122"/>
-              </a:rPr>
-              <a:t>,bug001</a:t>
-            </a:r>
-            <a:r>
-              <a:rPr lang="zh-CN" altLang="en-US" sz="1400" b="0" i="0" u="none" strike="noStrike">
-                <a:solidFill>
-                  <a:srgbClr val="E5E7EB"/>
-                </a:solidFill>
-                <a:latin typeface="Noto Sans SC" panose="020B0200000000000000" charset="-122"/>
-                <a:ea typeface="Noto Sans SC" panose="020B0200000000000000" charset="-122"/>
-                <a:cs typeface="Noto Sans SC" panose="020B0200000000000000" charset="-122"/>
-                <a:sym typeface="Noto Sans SC" panose="020B0200000000000000" charset="-122"/>
-              </a:rPr>
-              <a:t>的问题是正常现象</a:t>
-            </a:r>
-            <a:r>
-              <a:rPr lang="en-US" sz="1400" b="0" i="0" u="none" strike="noStrike">
-                <a:solidFill>
-                  <a:srgbClr val="E5E7EB"/>
-                </a:solidFill>
-                <a:latin typeface="Noto Sans SC" panose="020B0200000000000000" charset="-122"/>
-                <a:ea typeface="Noto Sans SC" panose="020B0200000000000000" charset="-122"/>
-                <a:cs typeface="Noto Sans SC" panose="020B0200000000000000" charset="-122"/>
-                <a:sym typeface="Noto Sans SC" panose="020B0200000000000000" charset="-122"/>
-              </a:rPr>
-              <a:t>。</a:t>
-            </a:r>
-            <a:endParaRPr lang="en-US" sz="1400" b="0" i="0" u="none" strike="noStrike">
+            <a:endParaRPr lang="zh-CN" altLang="en-US" sz="1400" b="0" i="0" u="none" strike="noStrike">
               <a:solidFill>
                 <a:srgbClr val="E5E7EB"/>
               </a:solidFill>
